--- a/curso/pptx/S81.pptx
+++ b/curso/pptx/S81.pptx
@@ -4281,7 +4281,7 @@
                 </a:solidFill>
                 <a:latin typeface="Nunito Sans"/>
               </a:rPr>
-              <a:t>Nace de </a:t>
+              <a:t>它来自草率的</a:t>
             </a:r>
             <a:r>
               <a:rPr sz="2800" b="1">
@@ -4290,7 +4290,7 @@
                 </a:solidFill>
                 <a:latin typeface="Nunito Sans"/>
               </a:rPr>
-              <a:t>generalizar</a:t>
+              <a:t>概括</a:t>
             </a:r>
             <a:r>
               <a:rPr sz="2800" b="0">
@@ -4299,7 +4299,7 @@
                 </a:solidFill>
                 <a:latin typeface="Nunito Sans"/>
               </a:rPr>
-              <a:t> deprisa, como vimos en la 第19课</a:t>
+              <a:t>，就像我们在第19课看到的那样</a:t>
             </a:r>
           </a:p>
           <a:p>
@@ -4324,7 +4324,7 @@
                 </a:solidFill>
                 <a:latin typeface="Nunito Sans"/>
               </a:rPr>
-              <a:t>Se parece al </a:t>
+              <a:t>它和</a:t>
             </a:r>
             <a:r>
               <a:rPr sz="2800" b="1">
@@ -4333,7 +4333,7 @@
                 </a:solidFill>
                 <a:latin typeface="Nunito Sans"/>
               </a:rPr>
-              <a:t>efecto halo</a:t>
+              <a:t>光环效应</a:t>
             </a:r>
             <a:r>
               <a:rPr sz="2800" b="0">
@@ -4342,7 +4342,7 @@
                 </a:solidFill>
                 <a:latin typeface="Nunito Sans"/>
               </a:rPr>
-              <a:t> （第45课）: un rasgo decide todo</a:t>
+              <a:t>（第45课）很像：一个特点决定了一切</a:t>
             </a:r>
           </a:p>
           <a:p>
@@ -4367,7 +4367,7 @@
                 </a:solidFill>
                 <a:latin typeface="Nunito Sans"/>
               </a:rPr>
-              <a:t>Pregunta que lo desmonta: «¿</a:t>
+              <a:t>能拆穿它的问题：“</a:t>
             </a:r>
             <a:r>
               <a:rPr sz="2800" b="1">
@@ -4376,7 +4376,7 @@
                 </a:solidFill>
                 <a:latin typeface="Nunito Sans"/>
               </a:rPr>
-              <a:t>cómo lo sabes</a:t>
+              <a:t>你怎么知道</a:t>
             </a:r>
             <a:r>
               <a:rPr sz="2800" b="0">
@@ -4385,7 +4385,7 @@
                 </a:solidFill>
                 <a:latin typeface="Nunito Sans"/>
               </a:rPr>
-              <a:t>? ¿Todas? ¿Todos?»</a:t>
+              <a:t>？所有人都这样吗？”</a:t>
             </a:r>
           </a:p>
         </p:txBody>
@@ -7158,7 +7158,7 @@
                 </a:solidFill>
                 <a:latin typeface="Nunito Sans"/>
               </a:rPr>
-              <a:t>Viene con el </a:t>
+              <a:t>它是</a:t>
             </a:r>
             <a:r>
               <a:rPr sz="2800" b="1">
@@ -7167,7 +7167,16 @@
                 </a:solidFill>
                 <a:latin typeface="Nunito Sans"/>
               </a:rPr>
-              <a:t>cuerpo</a:t>
+              <a:t>身体</a:t>
+            </a:r>
+            <a:r>
+              <a:rPr sz="2800" b="0">
+                <a:solidFill>
+                  <a:srgbClr val="1F2A44"/>
+                </a:solidFill>
+                <a:latin typeface="Nunito Sans"/>
+              </a:rPr>
+              <a:t>自带的</a:t>
             </a:r>
           </a:p>
           <a:p>
@@ -7192,7 +7201,7 @@
                 </a:solidFill>
                 <a:latin typeface="Nunito Sans"/>
               </a:rPr>
-              <a:t>Lo estudian la </a:t>
+              <a:t>由</a:t>
             </a:r>
             <a:r>
               <a:rPr sz="2800" b="1">
@@ -7201,7 +7210,7 @@
                 </a:solidFill>
                 <a:latin typeface="Nunito Sans"/>
               </a:rPr>
-              <a:t>biología</a:t>
+              <a:t>生物学</a:t>
             </a:r>
             <a:r>
               <a:rPr sz="2800" b="0">
@@ -7210,7 +7219,7 @@
                 </a:solidFill>
                 <a:latin typeface="Nunito Sans"/>
               </a:rPr>
-              <a:t> y la medicina</a:t>
+              <a:t>和医学来研究</a:t>
             </a:r>
           </a:p>
           <a:p>
@@ -7235,7 +7244,7 @@
                 </a:solidFill>
                 <a:latin typeface="Nunito Sans"/>
               </a:rPr>
-              <a:t>Ejemplo: la voz cambia en la pubertad por las hormonas</a:t>
+              <a:t>例子：青春期声音会因为激素而变化</a:t>
             </a:r>
           </a:p>
         </p:txBody>
@@ -7469,7 +7478,7 @@
                 </a:solidFill>
                 <a:latin typeface="Nunito Sans"/>
               </a:rPr>
-              <a:t>Rol:</a:t>
+              <a:t>角色：</a:t>
             </a:r>
             <a:r>
               <a:rPr sz="2800" b="0">
@@ -7478,7 +7487,7 @@
                 </a:solidFill>
                 <a:latin typeface="Nunito Sans"/>
               </a:rPr>
-              <a:t> el papel que se espera que hagas</a:t>
+              <a:t>人们期待你扮演的角色</a:t>
             </a:r>
           </a:p>
           <a:p>
@@ -7503,7 +7512,7 @@
                 </a:solidFill>
                 <a:latin typeface="Nunito Sans"/>
               </a:rPr>
-              <a:t>Se </a:t>
+              <a:t>它是</a:t>
             </a:r>
             <a:r>
               <a:rPr sz="2800" b="1">
@@ -7512,7 +7521,7 @@
                 </a:solidFill>
                 <a:latin typeface="Nunito Sans"/>
               </a:rPr>
-              <a:t>aprende</a:t>
+              <a:t>学来的</a:t>
             </a:r>
             <a:r>
               <a:rPr sz="2800" b="0">
@@ -7521,7 +7530,7 @@
                 </a:solidFill>
                 <a:latin typeface="Nunito Sans"/>
               </a:rPr>
-              <a:t>: en casa, en la escuela, en las pantallas</a:t>
+              <a:t>：在家里、在学校、在屏幕上</a:t>
             </a:r>
           </a:p>
           <a:p>
@@ -7546,7 +7555,7 @@
                 </a:solidFill>
                 <a:latin typeface="Nunito Sans"/>
               </a:rPr>
-              <a:t>Ejemplo: «los chicos no lloran», «las chicas cuidan»</a:t>
+              <a:t>例子：“男孩不哭”“女孩要照顾人”</a:t>
             </a:r>
           </a:p>
           <a:p>
@@ -7565,13 +7574,22 @@
               <a:t>• </a:t>
             </a:r>
             <a:r>
+              <a:rPr sz="2800" b="0">
+                <a:solidFill>
+                  <a:srgbClr val="1F2A44"/>
+                </a:solidFill>
+                <a:latin typeface="Nunito Sans"/>
+              </a:rPr>
+              <a:t>我们</a:t>
+            </a:r>
+            <a:r>
               <a:rPr sz="2800" b="1">
                 <a:solidFill>
                   <a:srgbClr val="1F2A44"/>
                 </a:solidFill>
                 <a:latin typeface="Nunito Sans"/>
               </a:rPr>
-              <a:t>Solemos distinguir</a:t>
+              <a:t>通常这样区分</a:t>
             </a:r>
             <a:r>
               <a:rPr sz="2800" b="0">
@@ -7580,7 +7598,7 @@
                 </a:solidFill>
                 <a:latin typeface="Nunito Sans"/>
               </a:rPr>
-              <a:t> así; hay quien lo explica de otras formas</a:t>
+              <a:t>；也有人用别的方式来解释</a:t>
             </a:r>
           </a:p>
         </p:txBody>
@@ -8073,7 +8091,7 @@
                 </a:solidFill>
                 <a:latin typeface="Nunito Sans"/>
               </a:rPr>
-              <a:t>En el siglo XVII, los </a:t>
+              <a:t>在17世纪，</a:t>
             </a:r>
             <a:r>
               <a:rPr sz="2800" b="1">
@@ -8082,7 +8100,7 @@
                 </a:solidFill>
                 <a:latin typeface="Nunito Sans"/>
               </a:rPr>
-              <a:t>tacones</a:t>
+              <a:t>高跟鞋</a:t>
             </a:r>
             <a:r>
               <a:rPr sz="2800" b="0">
@@ -8091,7 +8109,7 @@
                 </a:solidFill>
                 <a:latin typeface="Nunito Sans"/>
               </a:rPr>
-              <a:t> eran moda de hombres nobles en Europa</a:t>
+              <a:t>是欧洲贵族男子的时尚</a:t>
             </a:r>
           </a:p>
           <a:p>
@@ -8116,7 +8134,7 @@
                 </a:solidFill>
                 <a:latin typeface="Nunito Sans"/>
               </a:rPr>
-              <a:t>Rosa para niñas</a:t>
+              <a:t>女孩穿粉色</a:t>
             </a:r>
             <a:r>
               <a:rPr sz="2800" b="0">
@@ -8125,7 +8143,7 @@
                 </a:solidFill>
                 <a:latin typeface="Nunito Sans"/>
               </a:rPr>
-              <a:t> y azul para niños: se extendió en el siglo XX</a:t>
+              <a:t>、男孩穿蓝色：这是20世纪才流行起来的</a:t>
             </a:r>
           </a:p>
           <a:p>
@@ -8150,7 +8168,7 @@
                 </a:solidFill>
                 <a:latin typeface="Nunito Sans"/>
               </a:rPr>
-              <a:t>En Escocia, muchos hombres llevan </a:t>
+              <a:t>在苏格兰，很多男人在节日里穿</a:t>
             </a:r>
             <a:r>
               <a:rPr sz="2800" b="1">
@@ -8159,7 +8177,7 @@
                 </a:solidFill>
                 <a:latin typeface="Nunito Sans"/>
               </a:rPr>
-              <a:t>falda</a:t>
+              <a:t>裙子</a:t>
             </a:r>
             <a:r>
               <a:rPr sz="2800" b="0">
@@ -8168,7 +8186,7 @@
                 </a:solidFill>
                 <a:latin typeface="Nunito Sans"/>
               </a:rPr>
-              <a:t> (el kilt) en las fiestas</a:t>
+              <a:t>（苏格兰短裙）</a:t>
             </a:r>
           </a:p>
           <a:p>
@@ -8193,7 +8211,7 @@
                 </a:solidFill>
                 <a:latin typeface="Nunito Sans"/>
               </a:rPr>
-              <a:t>En España, hasta 1975, una mujer casada necesitaba </a:t>
+              <a:t>在西班牙，直到1975年，已婚女性工作还需要</a:t>
             </a:r>
             <a:r>
               <a:rPr sz="2800" b="1">
@@ -8202,16 +8220,7 @@
                 </a:solidFill>
                 <a:latin typeface="Nunito Sans"/>
               </a:rPr>
-              <a:t>permiso del marido</a:t>
-            </a:r>
-            <a:r>
-              <a:rPr sz="2800" b="0">
-                <a:solidFill>
-                  <a:srgbClr val="1F2A44"/>
-                </a:solidFill>
-                <a:latin typeface="Nunito Sans"/>
-              </a:rPr>
-              <a:t> para trabajar</a:t>
+              <a:t>丈夫的许可</a:t>
             </a:r>
           </a:p>
         </p:txBody>

--- a/curso/pptx/S81.pptx
+++ b/curso/pptx/S81.pptx
@@ -4571,7 +4571,7 @@
                 </a:solidFill>
                 <a:latin typeface="Nunito Sans"/>
               </a:rPr>
-              <a:t>Iker 看到学校机器人小组的名单，说：“一个女生？女生不适合搞技术。”</a:t>
+              <a:t>一个男孩看到学校机器人小组的名单，说：“一个女生？女生不适合搞技术。”</a:t>
             </a:r>
           </a:p>
         </p:txBody>
@@ -4898,7 +4898,7 @@
                 </a:solidFill>
                 <a:latin typeface="Nunito Sans"/>
               </a:rPr>
-              <a:t>Maialen 说：“我们足球学校有40个男生和12个女生”（虚构的例子）。Naiara 回答：“这是刻板印象！”</a:t>
+              <a:t>一个女孩说：“我们足球学校有40个男生和12个女生”（虚构的例子）。另一个女孩回答：“这是刻板印象！”</a:t>
             </a:r>
           </a:p>
         </p:txBody>
@@ -4946,7 +4946,7 @@
                 </a:solidFill>
                 <a:latin typeface="Nunito Sans"/>
               </a:rPr>
-              <a:t>Maialen 说了什么？一个数字：报名的男生和女生各有多少。</a:t>
+              <a:t>这个女孩说了什么？一个数字：报名的男生和女生各有多少。</a:t>
             </a:r>
           </a:p>
           <a:p>
@@ -5225,7 +5225,7 @@
                 </a:solidFill>
                 <a:latin typeface="Nunito Sans"/>
               </a:rPr>
-              <a:t>Omar 对妹妹说：“妈妈的生日你来安排吧，女生比较有条理。”他是把这话当作夸奖来说的。</a:t>
+              <a:t>一个男孩对妹妹说：“妈妈的生日你来安排吧，女生比较有条理。”他是把这话当作夸奖来说的。</a:t>
             </a:r>
           </a:p>
         </p:txBody>
